--- a/MichaelLin_presentation.pptx
+++ b/MichaelLin_presentation.pptx
@@ -5,7 +5,7 @@
     <p:sldMasterId id="2147483648" r:id="rId1"/>
   </p:sldMasterIdLst>
   <p:notesMasterIdLst>
-    <p:notesMasterId r:id="rId26"/>
+    <p:notesMasterId r:id="rId27"/>
   </p:notesMasterIdLst>
   <p:sldIdLst>
     <p:sldId id="256" r:id="rId2"/>
@@ -29,9 +29,10 @@
     <p:sldId id="275" r:id="rId20"/>
     <p:sldId id="278" r:id="rId21"/>
     <p:sldId id="276" r:id="rId22"/>
-    <p:sldId id="277" r:id="rId23"/>
-    <p:sldId id="279" r:id="rId24"/>
-    <p:sldId id="280" r:id="rId25"/>
+    <p:sldId id="281" r:id="rId23"/>
+    <p:sldId id="277" r:id="rId24"/>
+    <p:sldId id="279" r:id="rId25"/>
+    <p:sldId id="280" r:id="rId26"/>
   </p:sldIdLst>
   <p:sldSz cx="12192000" cy="6858000"/>
   <p:notesSz cx="6858000" cy="9144000"/>
@@ -220,7 +221,7 @@
           <a:p>
             <a:fld id="{BAD3B5A1-A34A-41AF-9B9B-BEB2D70054F2}" type="datetimeFigureOut">
               <a:rPr lang="zh-CN" altLang="en-US" smtClean="0"/>
-              <a:t>2026/5/18</a:t>
+              <a:t>2026/5/19</a:t>
             </a:fld>
             <a:endParaRPr lang="zh-CN" altLang="en-US"/>
           </a:p>
@@ -806,7 +807,7 @@
           <a:p>
             <a:fld id="{156DECF6-83B9-4A5A-819D-3B7379C85E21}" type="datetimeFigureOut">
               <a:rPr lang="zh-CN" altLang="en-US" smtClean="0"/>
-              <a:t>2026/5/18</a:t>
+              <a:t>2026/5/19</a:t>
             </a:fld>
             <a:endParaRPr lang="zh-CN" altLang="en-US"/>
           </a:p>
@@ -1004,7 +1005,7 @@
           <a:p>
             <a:fld id="{156DECF6-83B9-4A5A-819D-3B7379C85E21}" type="datetimeFigureOut">
               <a:rPr lang="zh-CN" altLang="en-US" smtClean="0"/>
-              <a:t>2026/5/18</a:t>
+              <a:t>2026/5/19</a:t>
             </a:fld>
             <a:endParaRPr lang="zh-CN" altLang="en-US"/>
           </a:p>
@@ -1212,7 +1213,7 @@
           <a:p>
             <a:fld id="{156DECF6-83B9-4A5A-819D-3B7379C85E21}" type="datetimeFigureOut">
               <a:rPr lang="zh-CN" altLang="en-US" smtClean="0"/>
-              <a:t>2026/5/18</a:t>
+              <a:t>2026/5/19</a:t>
             </a:fld>
             <a:endParaRPr lang="zh-CN" altLang="en-US"/>
           </a:p>
@@ -1410,7 +1411,7 @@
           <a:p>
             <a:fld id="{156DECF6-83B9-4A5A-819D-3B7379C85E21}" type="datetimeFigureOut">
               <a:rPr lang="zh-CN" altLang="en-US" smtClean="0"/>
-              <a:t>2026/5/18</a:t>
+              <a:t>2026/5/19</a:t>
             </a:fld>
             <a:endParaRPr lang="zh-CN" altLang="en-US"/>
           </a:p>
@@ -1685,7 +1686,7 @@
           <a:p>
             <a:fld id="{156DECF6-83B9-4A5A-819D-3B7379C85E21}" type="datetimeFigureOut">
               <a:rPr lang="zh-CN" altLang="en-US" smtClean="0"/>
-              <a:t>2026/5/18</a:t>
+              <a:t>2026/5/19</a:t>
             </a:fld>
             <a:endParaRPr lang="zh-CN" altLang="en-US"/>
           </a:p>
@@ -1950,7 +1951,7 @@
           <a:p>
             <a:fld id="{156DECF6-83B9-4A5A-819D-3B7379C85E21}" type="datetimeFigureOut">
               <a:rPr lang="zh-CN" altLang="en-US" smtClean="0"/>
-              <a:t>2026/5/18</a:t>
+              <a:t>2026/5/19</a:t>
             </a:fld>
             <a:endParaRPr lang="zh-CN" altLang="en-US"/>
           </a:p>
@@ -2362,7 +2363,7 @@
           <a:p>
             <a:fld id="{156DECF6-83B9-4A5A-819D-3B7379C85E21}" type="datetimeFigureOut">
               <a:rPr lang="zh-CN" altLang="en-US" smtClean="0"/>
-              <a:t>2026/5/18</a:t>
+              <a:t>2026/5/19</a:t>
             </a:fld>
             <a:endParaRPr lang="zh-CN" altLang="en-US"/>
           </a:p>
@@ -2503,7 +2504,7 @@
           <a:p>
             <a:fld id="{156DECF6-83B9-4A5A-819D-3B7379C85E21}" type="datetimeFigureOut">
               <a:rPr lang="zh-CN" altLang="en-US" smtClean="0"/>
-              <a:t>2026/5/18</a:t>
+              <a:t>2026/5/19</a:t>
             </a:fld>
             <a:endParaRPr lang="zh-CN" altLang="en-US"/>
           </a:p>
@@ -2616,7 +2617,7 @@
           <a:p>
             <a:fld id="{156DECF6-83B9-4A5A-819D-3B7379C85E21}" type="datetimeFigureOut">
               <a:rPr lang="zh-CN" altLang="en-US" smtClean="0"/>
-              <a:t>2026/5/18</a:t>
+              <a:t>2026/5/19</a:t>
             </a:fld>
             <a:endParaRPr lang="zh-CN" altLang="en-US"/>
           </a:p>
@@ -2927,7 +2928,7 @@
           <a:p>
             <a:fld id="{156DECF6-83B9-4A5A-819D-3B7379C85E21}" type="datetimeFigureOut">
               <a:rPr lang="zh-CN" altLang="en-US" smtClean="0"/>
-              <a:t>2026/5/18</a:t>
+              <a:t>2026/5/19</a:t>
             </a:fld>
             <a:endParaRPr lang="zh-CN" altLang="en-US"/>
           </a:p>
@@ -3215,7 +3216,7 @@
           <a:p>
             <a:fld id="{156DECF6-83B9-4A5A-819D-3B7379C85E21}" type="datetimeFigureOut">
               <a:rPr lang="zh-CN" altLang="en-US" smtClean="0"/>
-              <a:t>2026/5/18</a:t>
+              <a:t>2026/5/19</a:t>
             </a:fld>
             <a:endParaRPr lang="zh-CN" altLang="en-US"/>
           </a:p>
@@ -3456,7 +3457,7 @@
           <a:p>
             <a:fld id="{156DECF6-83B9-4A5A-819D-3B7379C85E21}" type="datetimeFigureOut">
               <a:rPr lang="zh-CN" altLang="en-US" smtClean="0"/>
-              <a:t>2026/5/18</a:t>
+              <a:t>2026/5/19</a:t>
             </a:fld>
             <a:endParaRPr lang="zh-CN" altLang="en-US"/>
           </a:p>
@@ -4073,6 +4074,59 @@
               <a:t>Michael Lin · Senior Project Presentation</a:t>
             </a:r>
             <a:endParaRPr lang="zh-CN" altLang="en-US" sz="2400" dirty="0">
+              <a:solidFill>
+                <a:schemeClr val="bg2">
+                  <a:lumMod val="50000"/>
+                </a:schemeClr>
+              </a:solidFill>
+              <a:latin typeface="Arial" panose="020B0604020202020204" pitchFamily="34" charset="0"/>
+              <a:cs typeface="Arial" panose="020B0604020202020204" pitchFamily="34" charset="0"/>
+            </a:endParaRPr>
+          </a:p>
+        </p:txBody>
+      </p:sp>
+      <p:sp>
+        <p:nvSpPr>
+          <p:cNvPr id="2" name="文本框 1">
+            <a:extLst>
+              <a:ext uri="{FF2B5EF4-FFF2-40B4-BE49-F238E27FC236}">
+                <a16:creationId xmlns:a16="http://schemas.microsoft.com/office/drawing/2014/main" id="{C07A69CC-91DA-8532-2AE1-672655D65F3D}"/>
+              </a:ext>
+            </a:extLst>
+          </p:cNvPr>
+          <p:cNvSpPr txBox="1"/>
+          <p:nvPr/>
+        </p:nvSpPr>
+        <p:spPr>
+          <a:xfrm>
+            <a:off x="3203468" y="5085761"/>
+            <a:ext cx="5977354" cy="400110"/>
+          </a:xfrm>
+          <a:prstGeom prst="rect">
+            <a:avLst/>
+          </a:prstGeom>
+          <a:noFill/>
+        </p:spPr>
+        <p:txBody>
+          <a:bodyPr wrap="square" rtlCol="0">
+            <a:spAutoFit/>
+          </a:bodyPr>
+          <a:lstStyle/>
+          <a:p>
+            <a:pPr algn="ctr"/>
+            <a:r>
+              <a:rPr lang="en-US" altLang="zh-CN" sz="2000" dirty="0">
+                <a:solidFill>
+                  <a:schemeClr val="bg2">
+                    <a:lumMod val="50000"/>
+                  </a:schemeClr>
+                </a:solidFill>
+                <a:latin typeface="Arial" panose="020B0604020202020204" pitchFamily="34" charset="0"/>
+                <a:cs typeface="Arial" panose="020B0604020202020204" pitchFamily="34" charset="0"/>
+              </a:rPr>
+              <a:t>Advisor: Mr. Benjamin Newton</a:t>
+            </a:r>
+            <a:endParaRPr lang="zh-CN" altLang="en-US" sz="2000" dirty="0">
               <a:solidFill>
                 <a:schemeClr val="bg2">
                   <a:lumMod val="50000"/>
@@ -17990,6 +18044,296 @@
         <p:cNvPr id="1" name="">
           <a:extLst>
             <a:ext uri="{FF2B5EF4-FFF2-40B4-BE49-F238E27FC236}">
+              <a16:creationId xmlns:a16="http://schemas.microsoft.com/office/drawing/2014/main" id="{3F9BEBB8-0B9D-E888-7C48-85BF33691029}"/>
+            </a:ext>
+          </a:extLst>
+        </p:cNvPr>
+        <p:cNvGrpSpPr/>
+        <p:nvPr/>
+      </p:nvGrpSpPr>
+      <p:grpSpPr>
+        <a:xfrm>
+          <a:off x="0" y="0"/>
+          <a:ext cx="0" cy="0"/>
+          <a:chOff x="0" y="0"/>
+          <a:chExt cx="0" cy="0"/>
+        </a:xfrm>
+      </p:grpSpPr>
+      <p:sp>
+        <p:nvSpPr>
+          <p:cNvPr id="2" name="矩形 1">
+            <a:extLst>
+              <a:ext uri="{FF2B5EF4-FFF2-40B4-BE49-F238E27FC236}">
+                <a16:creationId xmlns:a16="http://schemas.microsoft.com/office/drawing/2014/main" id="{F49223E6-20B8-EDD0-47D5-AECA1AC1D657}"/>
+              </a:ext>
+            </a:extLst>
+          </p:cNvPr>
+          <p:cNvSpPr>
+            <a:spLocks noGrp="1" noRot="1" noMove="1" noResize="1" noEditPoints="1" noAdjustHandles="1" noChangeArrowheads="1" noChangeShapeType="1"/>
+          </p:cNvSpPr>
+          <p:nvPr/>
+        </p:nvSpPr>
+        <p:spPr>
+          <a:xfrm>
+            <a:off x="0" y="0"/>
+            <a:ext cx="12192000" cy="6858000"/>
+          </a:xfrm>
+          <a:prstGeom prst="rect">
+            <a:avLst/>
+          </a:prstGeom>
+          <a:solidFill>
+            <a:srgbClr val="F7F5EF"/>
+          </a:solidFill>
+          <a:ln>
+            <a:noFill/>
+          </a:ln>
+        </p:spPr>
+        <p:style>
+          <a:lnRef idx="2">
+            <a:schemeClr val="accent1">
+              <a:shade val="15000"/>
+            </a:schemeClr>
+          </a:lnRef>
+          <a:fillRef idx="1">
+            <a:schemeClr val="accent1"/>
+          </a:fillRef>
+          <a:effectRef idx="0">
+            <a:schemeClr val="accent1"/>
+          </a:effectRef>
+          <a:fontRef idx="minor">
+            <a:schemeClr val="lt1"/>
+          </a:fontRef>
+        </p:style>
+        <p:txBody>
+          <a:bodyPr rtlCol="0" anchor="ctr"/>
+          <a:lstStyle/>
+          <a:p>
+            <a:pPr algn="ctr"/>
+            <a:r>
+              <a:rPr lang="en-US" altLang="zh-CN"/>
+              <a:t>o</a:t>
+            </a:r>
+            <a:endParaRPr lang="zh-CN" altLang="en-US" dirty="0"/>
+          </a:p>
+        </p:txBody>
+      </p:sp>
+      <p:cxnSp>
+        <p:nvCxnSpPr>
+          <p:cNvPr id="3" name="直接连接符 2">
+            <a:extLst>
+              <a:ext uri="{FF2B5EF4-FFF2-40B4-BE49-F238E27FC236}">
+                <a16:creationId xmlns:a16="http://schemas.microsoft.com/office/drawing/2014/main" id="{889D8610-1574-EA91-4F8C-D87C63FE8120}"/>
+              </a:ext>
+            </a:extLst>
+          </p:cNvPr>
+          <p:cNvCxnSpPr>
+            <a:cxnSpLocks/>
+          </p:cNvCxnSpPr>
+          <p:nvPr/>
+        </p:nvCxnSpPr>
+        <p:spPr>
+          <a:xfrm>
+            <a:off x="233202" y="1115383"/>
+            <a:ext cx="9148091" cy="0"/>
+          </a:xfrm>
+          <a:prstGeom prst="line">
+            <a:avLst/>
+          </a:prstGeom>
+        </p:spPr>
+        <p:style>
+          <a:lnRef idx="2">
+            <a:schemeClr val="accent1"/>
+          </a:lnRef>
+          <a:fillRef idx="0">
+            <a:schemeClr val="accent1"/>
+          </a:fillRef>
+          <a:effectRef idx="1">
+            <a:schemeClr val="accent1"/>
+          </a:effectRef>
+          <a:fontRef idx="minor">
+            <a:schemeClr val="tx1"/>
+          </a:fontRef>
+        </p:style>
+      </p:cxnSp>
+      <p:sp>
+        <p:nvSpPr>
+          <p:cNvPr id="4" name="文本框 3">
+            <a:extLst>
+              <a:ext uri="{FF2B5EF4-FFF2-40B4-BE49-F238E27FC236}">
+                <a16:creationId xmlns:a16="http://schemas.microsoft.com/office/drawing/2014/main" id="{9FA0B6E9-DF30-538A-A8C7-5F41B425EDFC}"/>
+              </a:ext>
+            </a:extLst>
+          </p:cNvPr>
+          <p:cNvSpPr txBox="1"/>
+          <p:nvPr/>
+        </p:nvSpPr>
+        <p:spPr>
+          <a:xfrm>
+            <a:off x="174900" y="407497"/>
+            <a:ext cx="7763195" cy="707886"/>
+          </a:xfrm>
+          <a:prstGeom prst="rect">
+            <a:avLst/>
+          </a:prstGeom>
+          <a:noFill/>
+        </p:spPr>
+        <p:txBody>
+          <a:bodyPr wrap="square" rtlCol="0">
+            <a:spAutoFit/>
+          </a:bodyPr>
+          <a:lstStyle/>
+          <a:p>
+            <a:r>
+              <a:rPr lang="en-US" altLang="zh-CN" sz="4000" b="1" dirty="0">
+                <a:latin typeface="Arial" panose="020B0604020202020204" pitchFamily="34" charset="0"/>
+                <a:cs typeface="Arial" panose="020B0604020202020204" pitchFamily="34" charset="0"/>
+              </a:rPr>
+              <a:t>Demo</a:t>
+            </a:r>
+          </a:p>
+        </p:txBody>
+      </p:sp>
+      <p:sp>
+        <p:nvSpPr>
+          <p:cNvPr id="5" name="文本框 4">
+            <a:extLst>
+              <a:ext uri="{FF2B5EF4-FFF2-40B4-BE49-F238E27FC236}">
+                <a16:creationId xmlns:a16="http://schemas.microsoft.com/office/drawing/2014/main" id="{AE5924F2-D2C3-81F6-5517-AEEF30E474C5}"/>
+              </a:ext>
+            </a:extLst>
+          </p:cNvPr>
+          <p:cNvSpPr txBox="1"/>
+          <p:nvPr/>
+        </p:nvSpPr>
+        <p:spPr>
+          <a:xfrm>
+            <a:off x="2544773" y="3020943"/>
+            <a:ext cx="7075861" cy="523220"/>
+          </a:xfrm>
+          <a:prstGeom prst="rect">
+            <a:avLst/>
+          </a:prstGeom>
+          <a:noFill/>
+        </p:spPr>
+        <p:txBody>
+          <a:bodyPr wrap="square" rtlCol="0">
+            <a:spAutoFit/>
+          </a:bodyPr>
+          <a:lstStyle/>
+          <a:p>
+            <a:r>
+              <a:rPr lang="en-US" altLang="zh-CN" sz="2800" dirty="0">
+                <a:latin typeface="Arial" panose="020B0604020202020204" pitchFamily="34" charset="0"/>
+                <a:cs typeface="Arial" panose="020B0604020202020204" pitchFamily="34" charset="0"/>
+              </a:rPr>
+              <a:t>https://github.com/MichaelLin3333/Co-EmP</a:t>
+            </a:r>
+            <a:endParaRPr lang="zh-CN" altLang="en-US" sz="2800" dirty="0">
+              <a:latin typeface="Arial" panose="020B0604020202020204" pitchFamily="34" charset="0"/>
+              <a:cs typeface="Arial" panose="020B0604020202020204" pitchFamily="34" charset="0"/>
+            </a:endParaRPr>
+          </a:p>
+        </p:txBody>
+      </p:sp>
+    </p:spTree>
+    <p:extLst>
+      <p:ext uri="{BB962C8B-B14F-4D97-AF65-F5344CB8AC3E}">
+        <p14:creationId xmlns:p14="http://schemas.microsoft.com/office/powerpoint/2010/main" val="644529095"/>
+      </p:ext>
+    </p:extLst>
+  </p:cSld>
+  <p:clrMapOvr>
+    <a:masterClrMapping/>
+  </p:clrMapOvr>
+  <p:timing>
+    <p:tnLst>
+      <p:par>
+        <p:cTn id="1" dur="indefinite" restart="never" nodeType="tmRoot">
+          <p:childTnLst>
+            <p:seq concurrent="1" nextAc="seek">
+              <p:cTn id="2" dur="indefinite" nodeType="mainSeq">
+                <p:childTnLst>
+                  <p:par>
+                    <p:cTn id="3" fill="hold">
+                      <p:stCondLst>
+                        <p:cond delay="indefinite"/>
+                      </p:stCondLst>
+                      <p:childTnLst>
+                        <p:par>
+                          <p:cTn id="4" fill="hold">
+                            <p:stCondLst>
+                              <p:cond delay="0"/>
+                            </p:stCondLst>
+                            <p:childTnLst>
+                              <p:par>
+                                <p:cTn id="5" presetID="1" presetClass="entr" presetSubtype="0" fill="hold" grpId="0" nodeType="clickEffect">
+                                  <p:stCondLst>
+                                    <p:cond delay="0"/>
+                                  </p:stCondLst>
+                                  <p:childTnLst>
+                                    <p:set>
+                                      <p:cBhvr>
+                                        <p:cTn id="6" dur="1" fill="hold">
+                                          <p:stCondLst>
+                                            <p:cond delay="0"/>
+                                          </p:stCondLst>
+                                        </p:cTn>
+                                        <p:tgtEl>
+                                          <p:spTgt spid="5"/>
+                                        </p:tgtEl>
+                                        <p:attrNameLst>
+                                          <p:attrName>style.visibility</p:attrName>
+                                        </p:attrNameLst>
+                                      </p:cBhvr>
+                                      <p:to>
+                                        <p:strVal val="visible"/>
+                                      </p:to>
+                                    </p:set>
+                                  </p:childTnLst>
+                                </p:cTn>
+                              </p:par>
+                            </p:childTnLst>
+                          </p:cTn>
+                        </p:par>
+                      </p:childTnLst>
+                    </p:cTn>
+                  </p:par>
+                </p:childTnLst>
+              </p:cTn>
+              <p:prevCondLst>
+                <p:cond evt="onPrev" delay="0">
+                  <p:tgtEl>
+                    <p:sldTgt/>
+                  </p:tgtEl>
+                </p:cond>
+              </p:prevCondLst>
+              <p:nextCondLst>
+                <p:cond evt="onNext" delay="0">
+                  <p:tgtEl>
+                    <p:sldTgt/>
+                  </p:tgtEl>
+                </p:cond>
+              </p:nextCondLst>
+            </p:seq>
+          </p:childTnLst>
+        </p:cTn>
+      </p:par>
+    </p:tnLst>
+    <p:bldLst>
+      <p:bldP spid="5" grpId="0"/>
+    </p:bldLst>
+  </p:timing>
+</p:sld>
+</file>
+
+<file path=ppt/slides/slide23.xml><?xml version="1.0" encoding="utf-8"?>
+<p:sld xmlns:a="http://schemas.openxmlformats.org/drawingml/2006/main" xmlns:r="http://schemas.openxmlformats.org/officeDocument/2006/relationships" xmlns:p="http://schemas.openxmlformats.org/presentationml/2006/main">
+  <p:cSld>
+    <p:spTree>
+      <p:nvGrpSpPr>
+        <p:cNvPr id="1" name="">
+          <a:extLst>
+            <a:ext uri="{FF2B5EF4-FFF2-40B4-BE49-F238E27FC236}">
               <a16:creationId xmlns:a16="http://schemas.microsoft.com/office/drawing/2014/main" id="{475F6D31-29D4-0324-8A4B-944A049F381B}"/>
             </a:ext>
           </a:extLst>
@@ -18276,7 +18620,7 @@
 </p:sld>
 </file>
 
-<file path=ppt/slides/slide23.xml><?xml version="1.0" encoding="utf-8"?>
+<file path=ppt/slides/slide24.xml><?xml version="1.0" encoding="utf-8"?>
 <p:sld xmlns:a="http://schemas.openxmlformats.org/drawingml/2006/main" xmlns:r="http://schemas.openxmlformats.org/officeDocument/2006/relationships" xmlns:p="http://schemas.openxmlformats.org/presentationml/2006/main">
   <p:cSld>
     <p:spTree>
@@ -18482,7 +18826,7 @@
 </p:sld>
 </file>
 
-<file path=ppt/slides/slide24.xml><?xml version="1.0" encoding="utf-8"?>
+<file path=ppt/slides/slide25.xml><?xml version="1.0" encoding="utf-8"?>
 <p:sld xmlns:a="http://schemas.openxmlformats.org/drawingml/2006/main" xmlns:r="http://schemas.openxmlformats.org/officeDocument/2006/relationships" xmlns:p="http://schemas.openxmlformats.org/presentationml/2006/main">
   <p:cSld>
     <p:spTree>
